--- a/lecons/F5/30_F5_M2_L27_Pollution.pptx
+++ b/lecons/F5/30_F5_M2_L27_Pollution.pptx
@@ -3369,7 +3369,7 @@
           <a:p>
             <a:r>
               <a:rPr lang="en-US" dirty="0"/>
-              <a:t>Let us copy Consequences and Solutions. Pollution has the following consequences and solutions. On this slide we have Consequences and Solutions. Write each point on a new line, with the key term first, and explain it in your own words when we revise. When you finish, we go to the next slide.</a:t>
+              <a:t>Let us copy Consequences and Solutions. Pollution has the following consequences, solutions and adaptation strategies. On this slide we have Consequences and Solutions. Write each point on a new line, with the key term first, and explain it in your own words when we revise. When you finish, we go to the next slide.</a:t>
             </a:r>
             <a:endParaRPr lang="en-US" dirty="0"/>
           </a:p>
@@ -14635,7 +14635,7 @@
                 <a:ea typeface="Times New Roman" pitchFamily="34" charset="-122"/>
                 <a:cs typeface="Times New Roman" pitchFamily="34" charset="-120"/>
               </a:rPr>
-              <a:t>Pollution has the following consequences and solutions:</a:t>
+              <a:t>Pollution has the following consequences, solutions and adaptation strategies:</a:t>
             </a:r>
             <a:endParaRPr lang="en-US" sz="4000" dirty="0"/>
           </a:p>

--- a/lecons/F5/30_F5_M2_L27_Pollution.pptx
+++ b/lecons/F5/30_F5_M2_L27_Pollution.pptx
@@ -57,9 +57,11 @@
     <p:sldId id="305" r:id="rId51"/>
     <p:sldId id="306" r:id="rId52"/>
     <p:sldId id="307" r:id="rId53"/>
+    <p:sldId id="308" r:id="rId54"/>
+    <p:sldId id="309" r:id="rId55"/>
   </p:sldIdLst>
   <p:notesMasterIdLst>
-    <p:notesMasterId r:id="rId54"/>
+    <p:notesMasterId r:id="rId56"/>
   </p:notesMasterIdLst>
   <p:sldSz cx="12192000" cy="6858000"/>
   <p:notesSz cx="6858000" cy="12192000"/>
@@ -3369,7 +3371,7 @@
           <a:p>
             <a:r>
               <a:rPr lang="en-US" dirty="0"/>
-              <a:t>Let us copy Consequences and Solutions. Pollution has the following consequences, solutions and adaptation strategies. On this slide we have Consequences and Solutions. Write each point on a new line, with the key term first, and explain it in your own words when we revise. When you finish, we go to the next slide.</a:t>
+              <a:t>Let us copy Consequences. Pollution has the following consequences. On this slide we have Diseases and Acid rain. Write each point on a new line, with the key term first, and explain it in your own words when we revise. When you finish, we go to the next slide.</a:t>
             </a:r>
             <a:endParaRPr lang="en-US" dirty="0"/>
           </a:p>
@@ -3545,7 +3547,7 @@
           <a:p>
             <a:r>
               <a:rPr lang="en-US" dirty="0"/>
-              <a:t>We continue with Consequences and Solutions. On this slide we have Adaptation strategies. Write each point on a new line, with the key term first, and explain it in your own words when we revise.</a:t>
+              <a:t>We continue with Consequences. On this slide we have Death of plants and animals and Stress. Write each point on a new line, with the key term first, and explain it in your own words when we revise.</a:t>
             </a:r>
             <a:endParaRPr lang="en-US" dirty="0"/>
           </a:p>
@@ -3633,7 +3635,7 @@
           <a:p>
             <a:r>
               <a:rPr lang="en-US" dirty="0"/>
-              <a:t>Now let us check what you have understood. Question 1: Define pollution. Answer in your exercise book.</a:t>
+              <a:t>Let us copy Solutions and Adaptation. Pollution is reduced and people adapt by the following measures. On this slide we have Laws, Clean technology and waste treatment and Tree planting. Write each point on a new line, with the key term first, and explain it in your own words when we revise. When you finish, we go to the next slide.</a:t>
             </a:r>
             <a:endParaRPr lang="en-US" dirty="0"/>
           </a:p>
@@ -3721,7 +3723,7 @@
           <a:p>
             <a:r>
               <a:rPr lang="en-US" dirty="0"/>
-              <a:t>The expected answer is: the introduction of harmful substances or energy into the environment. If you got it right, well done.</a:t>
+              <a:t>We continue with Solutions and Adaptation. On this slide we have Adaptation. Write each point on a new line, with the key term first, and explain it in your own words when we revise.</a:t>
             </a:r>
             <a:endParaRPr lang="en-US" dirty="0"/>
           </a:p>
@@ -3809,7 +3811,7 @@
           <a:p>
             <a:r>
               <a:rPr lang="en-US" dirty="0"/>
-              <a:t>Now let us check what you have understood. Question 2: Give one source and one solution for air pollution. Answer in your exercise book.</a:t>
+              <a:t>Now let us check what you have understood. Question 1: Define pollution. Answer in your exercise book.</a:t>
             </a:r>
             <a:endParaRPr lang="en-US" dirty="0"/>
           </a:p>
@@ -3897,7 +3899,7 @@
           <a:p>
             <a:r>
               <a:rPr lang="en-US" dirty="0"/>
-              <a:t>The expected answer is: vehicles; clean technology (also tree planting). If you got it right, well done.</a:t>
+              <a:t>The expected answer is: the introduction of harmful substances or energy into the environment. If you got it right, well done.</a:t>
             </a:r>
             <a:endParaRPr lang="en-US" dirty="0"/>
           </a:p>
@@ -3985,7 +3987,7 @@
           <a:p>
             <a:r>
               <a:rPr lang="en-US" dirty="0"/>
-              <a:t>For those who need more practice, fill in the blanks in your exercise book. The answers are: number 1, noise; number 2, water; number 3, rain.</a:t>
+              <a:t>Now let us check what you have understood. Question 2: Give one source and one solution for air pollution. Answer in your exercise book.</a:t>
             </a:r>
             <a:endParaRPr lang="en-US" dirty="0"/>
           </a:p>
@@ -4073,7 +4075,7 @@
           <a:p>
             <a:r>
               <a:rPr lang="en-US" dirty="0"/>
-              <a:t>For your homework: Identify two types of pollution in your town, their sources and one solution for each. We shall correct it at the beginning of our next lesson.</a:t>
+              <a:t>The expected answer is: vehicles; clean technology (also tree planting). If you got it right, well done.</a:t>
             </a:r>
             <a:endParaRPr lang="en-US" dirty="0"/>
           </a:p>
@@ -4161,7 +4163,7 @@
           <a:p>
             <a:r>
               <a:rPr lang="en-US" dirty="0"/>
-              <a:t>Our next lesson will be on Lesson 28: Basic Notions on Population. Thank you for your attention, and see you next time.</a:t>
+              <a:t>For those who need more practice, fill in the blanks in your exercise book. The answers are: number 1, noise; number 2, water; number 3, rain.</a:t>
             </a:r>
             <a:endParaRPr lang="en-US" dirty="0"/>
           </a:p>
@@ -4249,7 +4251,7 @@
           <a:p>
             <a:r>
               <a:rPr lang="en-US" dirty="0"/>
-              <a:t>Let us play the bilingual game. I say a word in English, and you give me the French word. Then we do the reverse.</a:t>
+              <a:t>For your homework: Identify two types of pollution in your town, their sources and one solution for each. We shall correct it at the beginning of our next lesson.</a:t>
             </a:r>
             <a:endParaRPr lang="en-US" dirty="0"/>
           </a:p>
@@ -4337,7 +4339,7 @@
           <a:p>
             <a:r>
               <a:rPr lang="en-US" dirty="0"/>
-              <a:t>I record this information in the official logbook of the class after the lesson.</a:t>
+              <a:t>Our next lesson will be on Lesson 28: Basic Notions on Population. Thank you for your attention, and see you next time.</a:t>
             </a:r>
             <a:endParaRPr lang="en-US" dirty="0"/>
           </a:p>
@@ -4513,7 +4515,7 @@
           <a:p>
             <a:r>
               <a:rPr lang="en-US" dirty="0"/>
-              <a:t>I complete the second page of the logbook: the matter taught, the evaluation, the homework and the attendance.</a:t>
+              <a:t>Let us play the bilingual game. I say a word in English, and you give me the French word. Then we do the reverse.</a:t>
             </a:r>
             <a:endParaRPr lang="en-US" dirty="0"/>
           </a:p>
@@ -4601,7 +4603,7 @@
           <a:p>
             <a:r>
               <a:rPr lang="en-US" dirty="0"/>
-              <a:t>This slide is for me, the teacher: it gives the timing of the lesson and what to do if the projector is not available.</a:t>
+              <a:t>I record this information in the official logbook of the class after the lesson.</a:t>
             </a:r>
             <a:endParaRPr lang="en-US" dirty="0"/>
           </a:p>
@@ -4689,7 +4691,7 @@
           <a:p>
             <a:r>
               <a:rPr lang="en-US" dirty="0"/>
-              <a:t>These are the references and picture credits used to prepare this lesson.</a:t>
+              <a:t>I complete the second page of the logbook: the matter taught, the evaluation, the homework and the attendance.</a:t>
             </a:r>
             <a:endParaRPr lang="en-US" dirty="0"/>
           </a:p>
@@ -4713,6 +4715,182 @@
             <a:fld id="{F7021451-1387-4CA6-816F-3879F97B5CBC}" type="slidenum">
               <a:rPr lang="en-US"/>
               <a:t>52</a:t>
+            </a:fld>
+            <a:endParaRPr lang="en-US"/>
+          </a:p>
+        </p:txBody>
+      </p:sp>
+    </p:spTree>
+    <p:extLst>
+      <p:ext uri="{BB962C8B-B14F-4D97-AF65-F5344CB8AC3E}">
+        <p14:creationId xmlns:p14="http://schemas.microsoft.com/office/powerpoint/2010/main" val="1024086991"/>
+      </p:ext>
+    </p:extLst>
+  </p:cSld>
+  <p:clrMapOvr>
+    <a:masterClrMapping/>
+  </p:clrMapOvr>
+</p:notes>
+</file>
+
+<file path=ppt/notesSlides/notesSlide53.xml><?xml version="1.0" encoding="utf-8"?>
+<p:notes xmlns:a="http://schemas.openxmlformats.org/drawingml/2006/main" xmlns:r="http://schemas.openxmlformats.org/officeDocument/2006/relationships" xmlns:p="http://schemas.openxmlformats.org/presentationml/2006/main">
+  <p:cSld>
+    <p:spTree>
+      <p:nvGrpSpPr>
+        <p:cNvPr id="1" name=""/>
+        <p:cNvGrpSpPr/>
+        <p:nvPr/>
+      </p:nvGrpSpPr>
+      <p:grpSpPr>
+        <a:xfrm>
+          <a:off x="0" y="0"/>
+          <a:ext cx="0" cy="0"/>
+          <a:chOff x="0" y="0"/>
+          <a:chExt cx="0" cy="0"/>
+        </a:xfrm>
+      </p:grpSpPr>
+      <p:sp>
+        <p:nvSpPr>
+          <p:cNvPr id="2" name="Slide Image Placeholder 1"/>
+          <p:cNvSpPr>
+            <a:spLocks noGrp="1" noRot="1" noChangeAspect="1"/>
+          </p:cNvSpPr>
+          <p:nvPr>
+            <p:ph type="sldImg"/>
+          </p:nvPr>
+        </p:nvSpPr>
+        <p:spPr/>
+      </p:sp>
+      <p:sp>
+        <p:nvSpPr>
+          <p:cNvPr id="3" name="Notes Placeholder 2"/>
+          <p:cNvSpPr>
+            <a:spLocks noGrp="1"/>
+          </p:cNvSpPr>
+          <p:nvPr>
+            <p:ph type="body" idx="1"/>
+          </p:nvPr>
+        </p:nvSpPr>
+        <p:spPr/>
+        <p:txBody>
+          <a:bodyPr/>
+          <a:lstStyle/>
+          <a:p>
+            <a:r>
+              <a:rPr lang="en-US" dirty="0"/>
+              <a:t>This slide is for me, the teacher: it gives the timing of the lesson and what to do if the projector is not available.</a:t>
+            </a:r>
+            <a:endParaRPr lang="en-US" dirty="0"/>
+          </a:p>
+        </p:txBody>
+      </p:sp>
+      <p:sp>
+        <p:nvSpPr>
+          <p:cNvPr id="4" name="Slide Number Placeholder 3"/>
+          <p:cNvSpPr>
+            <a:spLocks noGrp="1"/>
+          </p:cNvSpPr>
+          <p:nvPr>
+            <p:ph type="sldNum" sz="quarter" idx="10"/>
+          </p:nvPr>
+        </p:nvSpPr>
+        <p:spPr/>
+        <p:txBody>
+          <a:bodyPr/>
+          <a:lstStyle/>
+          <a:p>
+            <a:fld id="{F7021451-1387-4CA6-816F-3879F97B5CBC}" type="slidenum">
+              <a:rPr lang="en-US"/>
+              <a:t>53</a:t>
+            </a:fld>
+            <a:endParaRPr lang="en-US"/>
+          </a:p>
+        </p:txBody>
+      </p:sp>
+    </p:spTree>
+    <p:extLst>
+      <p:ext uri="{BB962C8B-B14F-4D97-AF65-F5344CB8AC3E}">
+        <p14:creationId xmlns:p14="http://schemas.microsoft.com/office/powerpoint/2010/main" val="1024086991"/>
+      </p:ext>
+    </p:extLst>
+  </p:cSld>
+  <p:clrMapOvr>
+    <a:masterClrMapping/>
+  </p:clrMapOvr>
+</p:notes>
+</file>
+
+<file path=ppt/notesSlides/notesSlide54.xml><?xml version="1.0" encoding="utf-8"?>
+<p:notes xmlns:a="http://schemas.openxmlformats.org/drawingml/2006/main" xmlns:r="http://schemas.openxmlformats.org/officeDocument/2006/relationships" xmlns:p="http://schemas.openxmlformats.org/presentationml/2006/main">
+  <p:cSld>
+    <p:spTree>
+      <p:nvGrpSpPr>
+        <p:cNvPr id="1" name=""/>
+        <p:cNvGrpSpPr/>
+        <p:nvPr/>
+      </p:nvGrpSpPr>
+      <p:grpSpPr>
+        <a:xfrm>
+          <a:off x="0" y="0"/>
+          <a:ext cx="0" cy="0"/>
+          <a:chOff x="0" y="0"/>
+          <a:chExt cx="0" cy="0"/>
+        </a:xfrm>
+      </p:grpSpPr>
+      <p:sp>
+        <p:nvSpPr>
+          <p:cNvPr id="2" name="Slide Image Placeholder 1"/>
+          <p:cNvSpPr>
+            <a:spLocks noGrp="1" noRot="1" noChangeAspect="1"/>
+          </p:cNvSpPr>
+          <p:nvPr>
+            <p:ph type="sldImg"/>
+          </p:nvPr>
+        </p:nvSpPr>
+        <p:spPr/>
+      </p:sp>
+      <p:sp>
+        <p:nvSpPr>
+          <p:cNvPr id="3" name="Notes Placeholder 2"/>
+          <p:cNvSpPr>
+            <a:spLocks noGrp="1"/>
+          </p:cNvSpPr>
+          <p:nvPr>
+            <p:ph type="body" idx="1"/>
+          </p:nvPr>
+        </p:nvSpPr>
+        <p:spPr/>
+        <p:txBody>
+          <a:bodyPr/>
+          <a:lstStyle/>
+          <a:p>
+            <a:r>
+              <a:rPr lang="en-US" dirty="0"/>
+              <a:t>These are the references and picture credits used to prepare this lesson.</a:t>
+            </a:r>
+            <a:endParaRPr lang="en-US" dirty="0"/>
+          </a:p>
+        </p:txBody>
+      </p:sp>
+      <p:sp>
+        <p:nvSpPr>
+          <p:cNvPr id="4" name="Slide Number Placeholder 3"/>
+          <p:cNvSpPr>
+            <a:spLocks noGrp="1"/>
+          </p:cNvSpPr>
+          <p:nvPr>
+            <p:ph type="sldNum" sz="quarter" idx="10"/>
+          </p:nvPr>
+        </p:nvSpPr>
+        <p:spPr/>
+        <p:txBody>
+          <a:bodyPr/>
+          <a:lstStyle/>
+          <a:p>
+            <a:fld id="{F7021451-1387-4CA6-816F-3879F97B5CBC}" type="slidenum">
+              <a:rPr lang="en-US"/>
+              <a:t>54</a:t>
             </a:fld>
             <a:endParaRPr lang="en-US"/>
           </a:p>
@@ -14551,7 +14729,7 @@
         <p:spPr>
           <a:xfrm>
             <a:off x="0" y="658368"/>
-            <a:ext cx="1463040" cy="5833872"/>
+            <a:ext cx="5120640" cy="5833872"/>
           </a:xfrm>
           <a:prstGeom prst="rect">
             <a:avLst/>
@@ -14566,8 +14744,8 @@
         </p:nvSpPr>
         <p:spPr>
           <a:xfrm>
-            <a:off x="1691640" y="1005840"/>
-            <a:ext cx="10180015" cy="731520"/>
+            <a:off x="5349240" y="1005840"/>
+            <a:ext cx="6522415" cy="731520"/>
           </a:xfrm>
           <a:prstGeom prst="rect">
             <a:avLst/>
@@ -14607,8 +14785,47 @@
         </p:nvSpPr>
         <p:spPr>
           <a:xfrm>
-            <a:off x="1691640" y="1783080"/>
-            <a:ext cx="10180015" cy="4663440"/>
+            <a:off x="5349240" y="1737360"/>
+            <a:ext cx="6522415" cy="457200"/>
+          </a:xfrm>
+          <a:prstGeom prst="rect">
+            <a:avLst/>
+          </a:prstGeom>
+          <a:noFill/>
+          <a:ln/>
+        </p:spPr>
+        <p:txBody>
+          <a:bodyPr wrap="square" lIns="0" tIns="0" rIns="0" bIns="0" rtlCol="0" anchor="ctr"/>
+          <a:lstStyle/>
+          <a:p>
+            <a:pPr algn="l" indent="0" marL="0">
+              <a:buNone/>
+            </a:pPr>
+            <a:r>
+              <a:rPr lang="en-US" sz="3200" b="1" dirty="0">
+                <a:solidFill>
+                  <a:srgbClr val="990011"/>
+                </a:solidFill>
+                <a:latin typeface="Times New Roman" pitchFamily="34" charset="0"/>
+                <a:ea typeface="Times New Roman" pitchFamily="34" charset="-122"/>
+                <a:cs typeface="Times New Roman" pitchFamily="34" charset="-120"/>
+              </a:rPr>
+              <a:t>A) Consequences</a:t>
+            </a:r>
+            <a:endParaRPr lang="en-US" sz="3200" dirty="0"/>
+          </a:p>
+        </p:txBody>
+      </p:sp>
+      <p:sp>
+        <p:nvSpPr>
+          <p:cNvPr id="6" name="Text 3"/>
+          <p:cNvSpPr/>
+          <p:nvPr/>
+        </p:nvSpPr>
+        <p:spPr>
+          <a:xfrm>
+            <a:off x="5349240" y="2240280"/>
+            <a:ext cx="6522415" cy="4206240"/>
           </a:xfrm>
           <a:prstGeom prst="rect">
             <a:avLst/>
@@ -14635,7 +14852,7 @@
                 <a:ea typeface="Times New Roman" pitchFamily="34" charset="-122"/>
                 <a:cs typeface="Times New Roman" pitchFamily="34" charset="-120"/>
               </a:rPr>
-              <a:t>Pollution has the following consequences, solutions and adaptation strategies:</a:t>
+              <a:t>Pollution has the following consequences:</a:t>
             </a:r>
             <a:endParaRPr lang="en-US" sz="4000" dirty="0"/>
           </a:p>
@@ -14655,7 +14872,7 @@
                 <a:ea typeface="Times New Roman" pitchFamily="34" charset="-122"/>
                 <a:cs typeface="Times New Roman" pitchFamily="34" charset="-120"/>
               </a:rPr>
-              <a:t>Consequences: </a:t>
+              <a:t>Diseases: </a:t>
             </a:r>
             <a:pPr algn="l" indent="0" marL="0">
               <a:spcAft>
@@ -14672,7 +14889,7 @@
                 <a:ea typeface="Times New Roman" pitchFamily="34" charset="-122"/>
                 <a:cs typeface="Times New Roman" pitchFamily="34" charset="-120"/>
               </a:rPr>
-              <a:t>It causes diseases, acid rain, death of plants and animals, and stress.</a:t>
+              <a:t>Dirty air and water make people ill.</a:t>
             </a:r>
             <a:endParaRPr lang="en-US" sz="4000" dirty="0"/>
           </a:p>
@@ -14692,7 +14909,7 @@
                 <a:ea typeface="Times New Roman" pitchFamily="34" charset="-122"/>
                 <a:cs typeface="Times New Roman" pitchFamily="34" charset="-120"/>
               </a:rPr>
-              <a:t>Solutions: </a:t>
+              <a:t>Acid rain: </a:t>
             </a:r>
             <a:pPr algn="l" indent="0" marL="0">
               <a:spcAft>
@@ -14709,7 +14926,7 @@
                 <a:ea typeface="Times New Roman" pitchFamily="34" charset="-122"/>
                 <a:cs typeface="Times New Roman" pitchFamily="34" charset="-120"/>
               </a:rPr>
-              <a:t>Laws, clean technology, waste treatment and tree planting reduce pollution.</a:t>
+              <a:t>It damages plants, soils and buildings.</a:t>
             </a:r>
             <a:endParaRPr lang="en-US" sz="4000" dirty="0"/>
           </a:p>
@@ -15125,7 +15342,7 @@
                 <a:ea typeface="Times New Roman" pitchFamily="34" charset="-122"/>
                 <a:cs typeface="Times New Roman" pitchFamily="34" charset="-120"/>
               </a:rPr>
-              <a:t>2. Consequences and Solutions (continued)</a:t>
+              <a:t>2. Consequences and Solutions</a:t>
             </a:r>
             <a:endParaRPr lang="en-US" sz="3600" dirty="0"/>
           </a:p>
@@ -15139,8 +15356,47 @@
         </p:nvSpPr>
         <p:spPr>
           <a:xfrm>
-            <a:off x="5349240" y="1783080"/>
-            <a:ext cx="6522415" cy="4663440"/>
+            <a:off x="5349240" y="1737360"/>
+            <a:ext cx="6522415" cy="457200"/>
+          </a:xfrm>
+          <a:prstGeom prst="rect">
+            <a:avLst/>
+          </a:prstGeom>
+          <a:noFill/>
+          <a:ln/>
+        </p:spPr>
+        <p:txBody>
+          <a:bodyPr wrap="square" lIns="0" tIns="0" rIns="0" bIns="0" rtlCol="0" anchor="ctr"/>
+          <a:lstStyle/>
+          <a:p>
+            <a:pPr algn="l" indent="0" marL="0">
+              <a:buNone/>
+            </a:pPr>
+            <a:r>
+              <a:rPr lang="en-US" sz="3200" b="1" dirty="0">
+                <a:solidFill>
+                  <a:srgbClr val="990011"/>
+                </a:solidFill>
+                <a:latin typeface="Times New Roman" pitchFamily="34" charset="0"/>
+                <a:ea typeface="Times New Roman" pitchFamily="34" charset="-122"/>
+                <a:cs typeface="Times New Roman" pitchFamily="34" charset="-120"/>
+              </a:rPr>
+              <a:t>A) Consequences (continued)</a:t>
+            </a:r>
+            <a:endParaRPr lang="en-US" sz="3200" dirty="0"/>
+          </a:p>
+        </p:txBody>
+      </p:sp>
+      <p:sp>
+        <p:nvSpPr>
+          <p:cNvPr id="6" name="Text 3"/>
+          <p:cNvSpPr/>
+          <p:nvPr/>
+        </p:nvSpPr>
+        <p:spPr>
+          <a:xfrm>
+            <a:off x="5349240" y="2240280"/>
+            <a:ext cx="6522415" cy="4206240"/>
           </a:xfrm>
           <a:prstGeom prst="rect">
             <a:avLst/>
@@ -15167,7 +15423,7 @@
                 <a:ea typeface="Times New Roman" pitchFamily="34" charset="-122"/>
                 <a:cs typeface="Times New Roman" pitchFamily="34" charset="-120"/>
               </a:rPr>
-              <a:t>Adaptation strategies: </a:t>
+              <a:t>Death of plants and animals: </a:t>
             </a:r>
             <a:pPr algn="l" indent="0" marL="0">
               <a:spcAft>
@@ -15184,7 +15440,44 @@
                 <a:ea typeface="Times New Roman" pitchFamily="34" charset="-122"/>
                 <a:cs typeface="Times New Roman" pitchFamily="34" charset="-120"/>
               </a:rPr>
-              <a:t>People wear masks, boil or filter water and plant trees around homes.</a:t>
+              <a:t>Polluted water kills fish.</a:t>
+            </a:r>
+            <a:endParaRPr lang="en-US" sz="4000" dirty="0"/>
+          </a:p>
+          <a:p>
+            <a:pPr algn="l" indent="0" marL="0">
+              <a:spcAft>
+                <a:spcPts val="800"/>
+              </a:spcAft>
+              <a:buNone/>
+            </a:pPr>
+            <a:r>
+              <a:rPr lang="en-US" sz="4000" b="1" dirty="0">
+                <a:solidFill>
+                  <a:srgbClr val="111111"/>
+                </a:solidFill>
+                <a:latin typeface="Times New Roman" pitchFamily="34" charset="0"/>
+                <a:ea typeface="Times New Roman" pitchFamily="34" charset="-122"/>
+                <a:cs typeface="Times New Roman" pitchFamily="34" charset="-120"/>
+              </a:rPr>
+              <a:t>Stress: </a:t>
+            </a:r>
+            <a:pPr algn="l" indent="0" marL="0">
+              <a:spcAft>
+                <a:spcPts val="800"/>
+              </a:spcAft>
+              <a:buNone/>
+            </a:pPr>
+            <a:r>
+              <a:rPr lang="en-US" sz="4000" dirty="0">
+                <a:solidFill>
+                  <a:srgbClr val="111111"/>
+                </a:solidFill>
+                <a:latin typeface="Times New Roman" pitchFamily="34" charset="0"/>
+                <a:ea typeface="Times New Roman" pitchFamily="34" charset="-122"/>
+                <a:cs typeface="Times New Roman" pitchFamily="34" charset="-120"/>
+              </a:rPr>
+              <a:t>Noise disturbs sleep and work.</a:t>
             </a:r>
             <a:endParaRPr lang="en-US" sz="4000" dirty="0"/>
           </a:p>
@@ -15296,7 +15589,7 @@
                 <a:ea typeface="Calibri" pitchFamily="34" charset="-122"/>
                 <a:cs typeface="Calibri" pitchFamily="34" charset="-120"/>
               </a:rPr>
-              <a:t>FORMATIVE EVALUATION</a:t>
+              <a:t>BOARD SUMMARY</a:t>
             </a:r>
             <a:endParaRPr lang="en-US" sz="1400" dirty="0"/>
           </a:p>
@@ -15319,7 +15612,7 @@
         <p:spPr>
           <a:xfrm>
             <a:off x="0" y="658368"/>
-            <a:ext cx="5120640" cy="5833872"/>
+            <a:ext cx="2468880" cy="5833872"/>
           </a:xfrm>
           <a:prstGeom prst="rect">
             <a:avLst/>
@@ -15334,8 +15627,8 @@
         </p:nvSpPr>
         <p:spPr>
           <a:xfrm>
-            <a:off x="5349240" y="1005840"/>
-            <a:ext cx="6522415" cy="731520"/>
+            <a:off x="2697480" y="1005840"/>
+            <a:ext cx="9174175" cy="731520"/>
           </a:xfrm>
           <a:prstGeom prst="rect">
             <a:avLst/>
@@ -15361,7 +15654,7 @@
                 <a:ea typeface="Times New Roman" pitchFamily="34" charset="-122"/>
                 <a:cs typeface="Times New Roman" pitchFamily="34" charset="-120"/>
               </a:rPr>
-              <a:t>Evaluation 1</a:t>
+              <a:t>2. Consequences and Solutions</a:t>
             </a:r>
             <a:endParaRPr lang="en-US" sz="3600" dirty="0"/>
           </a:p>
@@ -15375,8 +15668,47 @@
         </p:nvSpPr>
         <p:spPr>
           <a:xfrm>
-            <a:off x="5349240" y="1783080"/>
-            <a:ext cx="6522415" cy="4663440"/>
+            <a:off x="2697480" y="1737360"/>
+            <a:ext cx="9174175" cy="457200"/>
+          </a:xfrm>
+          <a:prstGeom prst="rect">
+            <a:avLst/>
+          </a:prstGeom>
+          <a:noFill/>
+          <a:ln/>
+        </p:spPr>
+        <p:txBody>
+          <a:bodyPr wrap="square" lIns="0" tIns="0" rIns="0" bIns="0" rtlCol="0" anchor="ctr"/>
+          <a:lstStyle/>
+          <a:p>
+            <a:pPr algn="l" indent="0" marL="0">
+              <a:buNone/>
+            </a:pPr>
+            <a:r>
+              <a:rPr lang="en-US" sz="3200" b="1" dirty="0">
+                <a:solidFill>
+                  <a:srgbClr val="990011"/>
+                </a:solidFill>
+                <a:latin typeface="Times New Roman" pitchFamily="34" charset="0"/>
+                <a:ea typeface="Times New Roman" pitchFamily="34" charset="-122"/>
+                <a:cs typeface="Times New Roman" pitchFamily="34" charset="-120"/>
+              </a:rPr>
+              <a:t>B) Solutions and Adaptation</a:t>
+            </a:r>
+            <a:endParaRPr lang="en-US" sz="3200" dirty="0"/>
+          </a:p>
+        </p:txBody>
+      </p:sp>
+      <p:sp>
+        <p:nvSpPr>
+          <p:cNvPr id="6" name="Text 3"/>
+          <p:cNvSpPr/>
+          <p:nvPr/>
+        </p:nvSpPr>
+        <p:spPr>
+          <a:xfrm>
+            <a:off x="2697480" y="2240280"/>
+            <a:ext cx="9174175" cy="4206240"/>
           </a:xfrm>
           <a:prstGeom prst="rect">
             <a:avLst/>
@@ -15395,7 +15727,7 @@
               <a:buNone/>
             </a:pPr>
             <a:r>
-              <a:rPr lang="en-US" sz="4000" dirty="0">
+              <a:rPr lang="en-US" sz="4000" i="1" dirty="0">
                 <a:solidFill>
                   <a:srgbClr val="111111"/>
                 </a:solidFill>
@@ -15403,7 +15735,118 @@
                 <a:ea typeface="Times New Roman" pitchFamily="34" charset="-122"/>
                 <a:cs typeface="Times New Roman" pitchFamily="34" charset="-120"/>
               </a:rPr>
-              <a:t>Define pollution.</a:t>
+              <a:t>Pollution is reduced and people adapt by the following measures:</a:t>
+            </a:r>
+            <a:endParaRPr lang="en-US" sz="4000" dirty="0"/>
+          </a:p>
+          <a:p>
+            <a:pPr algn="l" indent="0" marL="0">
+              <a:spcAft>
+                <a:spcPts val="800"/>
+              </a:spcAft>
+              <a:buNone/>
+            </a:pPr>
+            <a:r>
+              <a:rPr lang="en-US" sz="4000" b="1" dirty="0">
+                <a:solidFill>
+                  <a:srgbClr val="111111"/>
+                </a:solidFill>
+                <a:latin typeface="Times New Roman" pitchFamily="34" charset="0"/>
+                <a:ea typeface="Times New Roman" pitchFamily="34" charset="-122"/>
+                <a:cs typeface="Times New Roman" pitchFamily="34" charset="-120"/>
+              </a:rPr>
+              <a:t>Laws: </a:t>
+            </a:r>
+            <a:pPr algn="l" indent="0" marL="0">
+              <a:spcAft>
+                <a:spcPts val="800"/>
+              </a:spcAft>
+              <a:buNone/>
+            </a:pPr>
+            <a:r>
+              <a:rPr lang="en-US" sz="4000" dirty="0">
+                <a:solidFill>
+                  <a:srgbClr val="111111"/>
+                </a:solidFill>
+                <a:latin typeface="Times New Roman" pitchFamily="34" charset="0"/>
+                <a:ea typeface="Times New Roman" pitchFamily="34" charset="-122"/>
+                <a:cs typeface="Times New Roman" pitchFamily="34" charset="-120"/>
+              </a:rPr>
+              <a:t>Polluters are punished.</a:t>
+            </a:r>
+            <a:endParaRPr lang="en-US" sz="4000" dirty="0"/>
+          </a:p>
+          <a:p>
+            <a:pPr algn="l" indent="0" marL="0">
+              <a:spcAft>
+                <a:spcPts val="800"/>
+              </a:spcAft>
+              <a:buNone/>
+            </a:pPr>
+            <a:r>
+              <a:rPr lang="en-US" sz="4000" b="1" dirty="0">
+                <a:solidFill>
+                  <a:srgbClr val="111111"/>
+                </a:solidFill>
+                <a:latin typeface="Times New Roman" pitchFamily="34" charset="0"/>
+                <a:ea typeface="Times New Roman" pitchFamily="34" charset="-122"/>
+                <a:cs typeface="Times New Roman" pitchFamily="34" charset="-120"/>
+              </a:rPr>
+              <a:t>Clean technology and waste treatment: </a:t>
+            </a:r>
+            <a:pPr algn="l" indent="0" marL="0">
+              <a:spcAft>
+                <a:spcPts val="800"/>
+              </a:spcAft>
+              <a:buNone/>
+            </a:pPr>
+            <a:r>
+              <a:rPr lang="en-US" sz="4000" dirty="0">
+                <a:solidFill>
+                  <a:srgbClr val="111111"/>
+                </a:solidFill>
+                <a:latin typeface="Times New Roman" pitchFamily="34" charset="0"/>
+                <a:ea typeface="Times New Roman" pitchFamily="34" charset="-122"/>
+                <a:cs typeface="Times New Roman" pitchFamily="34" charset="-120"/>
+              </a:rPr>
+              <a:t>Factories filter smoke and treat waste.</a:t>
+            </a:r>
+            <a:endParaRPr lang="en-US" sz="4000" dirty="0"/>
+          </a:p>
+          <a:p>
+            <a:pPr algn="l" indent="0" marL="0">
+              <a:spcAft>
+                <a:spcPts val="800"/>
+              </a:spcAft>
+              <a:buNone/>
+            </a:pPr>
+            <a:r>
+              <a:rPr lang="en-US" sz="4000" b="1" dirty="0">
+                <a:solidFill>
+                  <a:srgbClr val="111111"/>
+                </a:solidFill>
+                <a:latin typeface="Times New Roman" pitchFamily="34" charset="0"/>
+                <a:ea typeface="Times New Roman" pitchFamily="34" charset="-122"/>
+                <a:cs typeface="Times New Roman" pitchFamily="34" charset="-120"/>
+              </a:rPr>
+              <a:t>Tree planting: </a:t>
+            </a:r>
+            <a:pPr algn="l" indent="0" marL="0">
+              <a:spcAft>
+                <a:spcPts val="800"/>
+              </a:spcAft>
+              <a:buNone/>
+            </a:pPr>
+            <a:r>
+              <a:rPr lang="en-US" sz="4000" dirty="0">
+                <a:solidFill>
+                  <a:srgbClr val="111111"/>
+                </a:solidFill>
+                <a:latin typeface="Times New Roman" pitchFamily="34" charset="0"/>
+                <a:ea typeface="Times New Roman" pitchFamily="34" charset="-122"/>
+                <a:cs typeface="Times New Roman" pitchFamily="34" charset="-120"/>
+              </a:rPr>
+              <a:t>Trees clean the air.</a:t>
             </a:r>
             <a:endParaRPr lang="en-US" sz="4000" dirty="0"/>
           </a:p>
@@ -15515,7 +15958,7 @@
                 <a:ea typeface="Calibri" pitchFamily="34" charset="-122"/>
                 <a:cs typeface="Calibri" pitchFamily="34" charset="-120"/>
               </a:rPr>
-              <a:t>FORMATIVE EVALUATION</a:t>
+              <a:t>BOARD SUMMARY</a:t>
             </a:r>
             <a:endParaRPr lang="en-US" sz="1400" dirty="0"/>
           </a:p>
@@ -15580,7 +16023,7 @@
                 <a:ea typeface="Times New Roman" pitchFamily="34" charset="-122"/>
                 <a:cs typeface="Times New Roman" pitchFamily="34" charset="-120"/>
               </a:rPr>
-              <a:t>Expected Answer</a:t>
+              <a:t>2. Consequences and Solutions</a:t>
             </a:r>
             <a:endParaRPr lang="en-US" sz="3600" dirty="0"/>
           </a:p>
@@ -15594,8 +16037,47 @@
         </p:nvSpPr>
         <p:spPr>
           <a:xfrm>
-            <a:off x="5349240" y="1783080"/>
-            <a:ext cx="6522415" cy="4663440"/>
+            <a:off x="5349240" y="1737360"/>
+            <a:ext cx="6522415" cy="457200"/>
+          </a:xfrm>
+          <a:prstGeom prst="rect">
+            <a:avLst/>
+          </a:prstGeom>
+          <a:noFill/>
+          <a:ln/>
+        </p:spPr>
+        <p:txBody>
+          <a:bodyPr wrap="square" lIns="0" tIns="0" rIns="0" bIns="0" rtlCol="0" anchor="ctr"/>
+          <a:lstStyle/>
+          <a:p>
+            <a:pPr algn="l" indent="0" marL="0">
+              <a:buNone/>
+            </a:pPr>
+            <a:r>
+              <a:rPr lang="en-US" sz="2600" b="1" dirty="0">
+                <a:solidFill>
+                  <a:srgbClr val="990011"/>
+                </a:solidFill>
+                <a:latin typeface="Times New Roman" pitchFamily="34" charset="0"/>
+                <a:ea typeface="Times New Roman" pitchFamily="34" charset="-122"/>
+                <a:cs typeface="Times New Roman" pitchFamily="34" charset="-120"/>
+              </a:rPr>
+              <a:t>B) Solutions and Adaptation (continued)</a:t>
+            </a:r>
+            <a:endParaRPr lang="en-US" sz="2600" dirty="0"/>
+          </a:p>
+        </p:txBody>
+      </p:sp>
+      <p:sp>
+        <p:nvSpPr>
+          <p:cNvPr id="6" name="Text 3"/>
+          <p:cNvSpPr/>
+          <p:nvPr/>
+        </p:nvSpPr>
+        <p:spPr>
+          <a:xfrm>
+            <a:off x="5349240" y="2240280"/>
+            <a:ext cx="6522415" cy="4206240"/>
           </a:xfrm>
           <a:prstGeom prst="rect">
             <a:avLst/>
@@ -15614,7 +16096,7 @@
               <a:buNone/>
             </a:pPr>
             <a:r>
-              <a:rPr lang="en-US" sz="4000" dirty="0">
+              <a:rPr lang="en-US" sz="4000" b="1" dirty="0">
                 <a:solidFill>
                   <a:srgbClr val="111111"/>
                 </a:solidFill>
@@ -15622,7 +16104,24 @@
                 <a:ea typeface="Times New Roman" pitchFamily="34" charset="-122"/>
                 <a:cs typeface="Times New Roman" pitchFamily="34" charset="-120"/>
               </a:rPr>
-              <a:t>The introduction of harmful substances or energy into the environment.</a:t>
+              <a:t>Adaptation: </a:t>
+            </a:r>
+            <a:pPr algn="l" indent="0" marL="0">
+              <a:spcAft>
+                <a:spcPts val="800"/>
+              </a:spcAft>
+              <a:buNone/>
+            </a:pPr>
+            <a:r>
+              <a:rPr lang="en-US" sz="4000" dirty="0">
+                <a:solidFill>
+                  <a:srgbClr val="111111"/>
+                </a:solidFill>
+                <a:latin typeface="Times New Roman" pitchFamily="34" charset="0"/>
+                <a:ea typeface="Times New Roman" pitchFamily="34" charset="-122"/>
+                <a:cs typeface="Times New Roman" pitchFamily="34" charset="-120"/>
+              </a:rPr>
+              <a:t>People wear masks and boil or filter water.</a:t>
             </a:r>
             <a:endParaRPr lang="en-US" sz="4000" dirty="0"/>
           </a:p>
@@ -15799,7 +16298,7 @@
                 <a:ea typeface="Times New Roman" pitchFamily="34" charset="-122"/>
                 <a:cs typeface="Times New Roman" pitchFamily="34" charset="-120"/>
               </a:rPr>
-              <a:t>Evaluation 2</a:t>
+              <a:t>Evaluation 1</a:t>
             </a:r>
             <a:endParaRPr lang="en-US" sz="3600" dirty="0"/>
           </a:p>
@@ -15841,7 +16340,7 @@
                 <a:ea typeface="Times New Roman" pitchFamily="34" charset="-122"/>
                 <a:cs typeface="Times New Roman" pitchFamily="34" charset="-120"/>
               </a:rPr>
-              <a:t>Give one source and one solution for air pollution.</a:t>
+              <a:t>Define pollution.</a:t>
             </a:r>
             <a:endParaRPr lang="en-US" sz="4000" dirty="0"/>
           </a:p>
@@ -16060,7 +16559,7 @@
                 <a:ea typeface="Times New Roman" pitchFamily="34" charset="-122"/>
                 <a:cs typeface="Times New Roman" pitchFamily="34" charset="-120"/>
               </a:rPr>
-              <a:t>Vehicles; clean technology (also tree planting).</a:t>
+              <a:t>The introduction of harmful substances or energy into the environment.</a:t>
             </a:r>
             <a:endParaRPr lang="en-US" sz="4000" dirty="0"/>
           </a:p>
@@ -16172,7 +16671,7 @@
                 <a:ea typeface="Calibri" pitchFamily="34" charset="-122"/>
                 <a:cs typeface="Calibri" pitchFamily="34" charset="-120"/>
               </a:rPr>
-              <a:t>REMEDIATION</a:t>
+              <a:t>FORMATIVE EVALUATION</a:t>
             </a:r>
             <a:endParaRPr lang="en-US" sz="1400" dirty="0"/>
           </a:p>
@@ -16195,7 +16694,7 @@
         <p:spPr>
           <a:xfrm>
             <a:off x="0" y="658368"/>
-            <a:ext cx="2468880" cy="5833872"/>
+            <a:ext cx="5120640" cy="5833872"/>
           </a:xfrm>
           <a:prstGeom prst="rect">
             <a:avLst/>
@@ -16210,8 +16709,8 @@
         </p:nvSpPr>
         <p:spPr>
           <a:xfrm>
-            <a:off x="2697480" y="1005840"/>
-            <a:ext cx="9174175" cy="731520"/>
+            <a:off x="5349240" y="1005840"/>
+            <a:ext cx="6522415" cy="731520"/>
           </a:xfrm>
           <a:prstGeom prst="rect">
             <a:avLst/>
@@ -16237,7 +16736,7 @@
                 <a:ea typeface="Times New Roman" pitchFamily="34" charset="-122"/>
                 <a:cs typeface="Times New Roman" pitchFamily="34" charset="-120"/>
               </a:rPr>
-              <a:t>Remediation</a:t>
+              <a:t>Evaluation 2</a:t>
             </a:r>
             <a:endParaRPr lang="en-US" sz="3600" dirty="0"/>
           </a:p>
@@ -16251,8 +16750,8 @@
         </p:nvSpPr>
         <p:spPr>
           <a:xfrm>
-            <a:off x="2697480" y="1783080"/>
-            <a:ext cx="9174175" cy="4663440"/>
+            <a:off x="5349240" y="1783080"/>
+            <a:ext cx="6522415" cy="4663440"/>
           </a:xfrm>
           <a:prstGeom prst="rect">
             <a:avLst/>
@@ -16271,7 +16770,7 @@
               <a:buNone/>
             </a:pPr>
             <a:r>
-              <a:rPr lang="en-US" sz="4000" b="1" dirty="0">
+              <a:rPr lang="en-US" sz="4000" dirty="0">
                 <a:solidFill>
                   <a:srgbClr val="111111"/>
                 </a:solidFill>
@@ -16279,73 +16778,7 @@
                 <a:ea typeface="Times New Roman" pitchFamily="34" charset="-122"/>
                 <a:cs typeface="Times New Roman" pitchFamily="34" charset="-120"/>
               </a:rPr>
-              <a:t>Fill in the blanks:</a:t>
-            </a:r>
-            <a:endParaRPr lang="en-US" sz="4000" dirty="0"/>
-          </a:p>
-          <a:p>
-            <a:pPr algn="l" marL="342900" indent="-342900">
-              <a:spcAft>
-                <a:spcPts val="800"/>
-              </a:spcAft>
-              <a:buSzPct val="100000"/>
-              <a:buFont typeface="+mj-lt"/>
-              <a:buAutoNum type="arabicPeriod" startAt="1"/>
-            </a:pPr>
-            <a:r>
-              <a:rPr lang="en-US" sz="4000" dirty="0">
-                <a:solidFill>
-                  <a:srgbClr val="111111"/>
-                </a:solidFill>
-                <a:latin typeface="Times New Roman" pitchFamily="34" charset="0"/>
-                <a:ea typeface="Times New Roman" pitchFamily="34" charset="-122"/>
-                <a:cs typeface="Times New Roman" pitchFamily="34" charset="-120"/>
-              </a:rPr>
-              <a:t>Loud sounds cause ______ pollution.</a:t>
-            </a:r>
-            <a:endParaRPr lang="en-US" sz="4000" dirty="0"/>
-          </a:p>
-          <a:p>
-            <a:pPr algn="l" marL="342900" indent="-342900">
-              <a:spcAft>
-                <a:spcPts val="800"/>
-              </a:spcAft>
-              <a:buSzPct val="100000"/>
-              <a:buFont typeface="+mj-lt"/>
-              <a:buAutoNum type="arabicPeriod" startAt="1"/>
-            </a:pPr>
-            <a:r>
-              <a:rPr lang="en-US" sz="4000" dirty="0">
-                <a:solidFill>
-                  <a:srgbClr val="111111"/>
-                </a:solidFill>
-                <a:latin typeface="Times New Roman" pitchFamily="34" charset="0"/>
-                <a:ea typeface="Times New Roman" pitchFamily="34" charset="-122"/>
-                <a:cs typeface="Times New Roman" pitchFamily="34" charset="-120"/>
-              </a:rPr>
-              <a:t>Oil spills cause ______ pollution.</a:t>
-            </a:r>
-            <a:endParaRPr lang="en-US" sz="4000" dirty="0"/>
-          </a:p>
-          <a:p>
-            <a:pPr algn="l" marL="342900" indent="-342900">
-              <a:spcAft>
-                <a:spcPts val="800"/>
-              </a:spcAft>
-              <a:buSzPct val="100000"/>
-              <a:buFont typeface="+mj-lt"/>
-              <a:buAutoNum type="arabicPeriod" startAt="1"/>
-            </a:pPr>
-            <a:r>
-              <a:rPr lang="en-US" sz="4000" dirty="0">
-                <a:solidFill>
-                  <a:srgbClr val="111111"/>
-                </a:solidFill>
-                <a:latin typeface="Times New Roman" pitchFamily="34" charset="0"/>
-                <a:ea typeface="Times New Roman" pitchFamily="34" charset="-122"/>
-                <a:cs typeface="Times New Roman" pitchFamily="34" charset="-120"/>
-              </a:rPr>
-              <a:t>Rain made acid by gases is acid ______.</a:t>
+              <a:t>Give one source and one solution for air pollution.</a:t>
             </a:r>
             <a:endParaRPr lang="en-US" sz="4000" dirty="0"/>
           </a:p>
@@ -16457,7 +16890,7 @@
                 <a:ea typeface="Calibri" pitchFamily="34" charset="-122"/>
                 <a:cs typeface="Calibri" pitchFamily="34" charset="-120"/>
               </a:rPr>
-              <a:t>HOMEWORK</a:t>
+              <a:t>FORMATIVE EVALUATION</a:t>
             </a:r>
             <a:endParaRPr lang="en-US" sz="1400" dirty="0"/>
           </a:p>
@@ -16522,7 +16955,7 @@
                 <a:ea typeface="Times New Roman" pitchFamily="34" charset="-122"/>
                 <a:cs typeface="Times New Roman" pitchFamily="34" charset="-120"/>
               </a:rPr>
-              <a:t>Homework</a:t>
+              <a:t>Expected Answer</a:t>
             </a:r>
             <a:endParaRPr lang="en-US" sz="3600" dirty="0"/>
           </a:p>
@@ -16564,7 +16997,7 @@
                 <a:ea typeface="Times New Roman" pitchFamily="34" charset="-122"/>
                 <a:cs typeface="Times New Roman" pitchFamily="34" charset="-120"/>
               </a:rPr>
-              <a:t>Identify two types of pollution in your town, their sources and one solution for each.</a:t>
+              <a:t>Vehicles; clean technology (also tree planting).</a:t>
             </a:r>
             <a:endParaRPr lang="en-US" sz="4000" dirty="0"/>
           </a:p>
@@ -16676,7 +17109,7 @@
                 <a:ea typeface="Calibri" pitchFamily="34" charset="-122"/>
                 <a:cs typeface="Calibri" pitchFamily="34" charset="-120"/>
               </a:rPr>
-              <a:t>NEXT LESSON</a:t>
+              <a:t>REMEDIATION</a:t>
             </a:r>
             <a:endParaRPr lang="en-US" sz="1400" dirty="0"/>
           </a:p>
@@ -16699,7 +17132,7 @@
         <p:spPr>
           <a:xfrm>
             <a:off x="0" y="658368"/>
-            <a:ext cx="5120640" cy="5833872"/>
+            <a:ext cx="2468880" cy="5833872"/>
           </a:xfrm>
           <a:prstGeom prst="rect">
             <a:avLst/>
@@ -16714,8 +17147,8 @@
         </p:nvSpPr>
         <p:spPr>
           <a:xfrm>
-            <a:off x="5349240" y="1005840"/>
-            <a:ext cx="6522415" cy="731520"/>
+            <a:off x="2697480" y="1005840"/>
+            <a:ext cx="9174175" cy="731520"/>
           </a:xfrm>
           <a:prstGeom prst="rect">
             <a:avLst/>
@@ -16741,7 +17174,7 @@
                 <a:ea typeface="Times New Roman" pitchFamily="34" charset="-122"/>
                 <a:cs typeface="Times New Roman" pitchFamily="34" charset="-120"/>
               </a:rPr>
-              <a:t>Next Lesson</a:t>
+              <a:t>Remediation</a:t>
             </a:r>
             <a:endParaRPr lang="en-US" sz="3600" dirty="0"/>
           </a:p>
@@ -16755,8 +17188,8 @@
         </p:nvSpPr>
         <p:spPr>
           <a:xfrm>
-            <a:off x="5349240" y="1783080"/>
-            <a:ext cx="6522415" cy="4663440"/>
+            <a:off x="2697480" y="1783080"/>
+            <a:ext cx="9174175" cy="4663440"/>
           </a:xfrm>
           <a:prstGeom prst="rect">
             <a:avLst/>
@@ -16765,10 +17198,10 @@
           <a:ln/>
         </p:spPr>
         <p:txBody>
-          <a:bodyPr wrap="square" lIns="0" tIns="0" rIns="0" bIns="0" rtlCol="0" anchor="ctr"/>
-          <a:lstStyle/>
-          <a:p>
-            <a:pPr algn="ctr" indent="0" marL="0">
+          <a:bodyPr wrap="square" lIns="0" tIns="0" rIns="0" bIns="0" rtlCol="0" anchor="t"/>
+          <a:lstStyle/>
+          <a:p>
+            <a:pPr algn="l" indent="0" marL="0">
               <a:spcAft>
                 <a:spcPts val="800"/>
               </a:spcAft>
@@ -16783,27 +17216,73 @@
                 <a:ea typeface="Times New Roman" pitchFamily="34" charset="-122"/>
                 <a:cs typeface="Times New Roman" pitchFamily="34" charset="-120"/>
               </a:rPr>
-              <a:t>Our next lesson will be on:</a:t>
+              <a:t>Fill in the blanks:</a:t>
             </a:r>
             <a:endParaRPr lang="en-US" sz="4000" dirty="0"/>
           </a:p>
           <a:p>
-            <a:pPr algn="ctr" indent="0" marL="0">
+            <a:pPr algn="l" marL="342900" indent="-342900">
               <a:spcAft>
                 <a:spcPts val="800"/>
               </a:spcAft>
-              <a:buNone/>
+              <a:buSzPct val="100000"/>
+              <a:buFont typeface="+mj-lt"/>
+              <a:buAutoNum type="arabicPeriod" startAt="1"/>
             </a:pPr>
             <a:r>
-              <a:rPr lang="en-US" sz="4000" b="1" dirty="0">
-                <a:solidFill>
-                  <a:srgbClr val="990011"/>
+              <a:rPr lang="en-US" sz="4000" dirty="0">
+                <a:solidFill>
+                  <a:srgbClr val="111111"/>
                 </a:solidFill>
                 <a:latin typeface="Times New Roman" pitchFamily="34" charset="0"/>
                 <a:ea typeface="Times New Roman" pitchFamily="34" charset="-122"/>
                 <a:cs typeface="Times New Roman" pitchFamily="34" charset="-120"/>
               </a:rPr>
-              <a:t>Lesson 28: Basic Notions on Population</a:t>
+              <a:t>Loud sounds cause ______ pollution.</a:t>
+            </a:r>
+            <a:endParaRPr lang="en-US" sz="4000" dirty="0"/>
+          </a:p>
+          <a:p>
+            <a:pPr algn="l" marL="342900" indent="-342900">
+              <a:spcAft>
+                <a:spcPts val="800"/>
+              </a:spcAft>
+              <a:buSzPct val="100000"/>
+              <a:buFont typeface="+mj-lt"/>
+              <a:buAutoNum type="arabicPeriod" startAt="1"/>
+            </a:pPr>
+            <a:r>
+              <a:rPr lang="en-US" sz="4000" dirty="0">
+                <a:solidFill>
+                  <a:srgbClr val="111111"/>
+                </a:solidFill>
+                <a:latin typeface="Times New Roman" pitchFamily="34" charset="0"/>
+                <a:ea typeface="Times New Roman" pitchFamily="34" charset="-122"/>
+                <a:cs typeface="Times New Roman" pitchFamily="34" charset="-120"/>
+              </a:rPr>
+              <a:t>Oil spills cause ______ pollution.</a:t>
+            </a:r>
+            <a:endParaRPr lang="en-US" sz="4000" dirty="0"/>
+          </a:p>
+          <a:p>
+            <a:pPr algn="l" marL="342900" indent="-342900">
+              <a:spcAft>
+                <a:spcPts val="800"/>
+              </a:spcAft>
+              <a:buSzPct val="100000"/>
+              <a:buFont typeface="+mj-lt"/>
+              <a:buAutoNum type="arabicPeriod" startAt="1"/>
+            </a:pPr>
+            <a:r>
+              <a:rPr lang="en-US" sz="4000" dirty="0">
+                <a:solidFill>
+                  <a:srgbClr val="111111"/>
+                </a:solidFill>
+                <a:latin typeface="Times New Roman" pitchFamily="34" charset="0"/>
+                <a:ea typeface="Times New Roman" pitchFamily="34" charset="-122"/>
+                <a:cs typeface="Times New Roman" pitchFamily="34" charset="-120"/>
+              </a:rPr>
+              <a:t>Rain made acid by gases is acid ______.</a:t>
             </a:r>
             <a:endParaRPr lang="en-US" sz="4000" dirty="0"/>
           </a:p>
@@ -16915,6 +17394,683 @@
                 <a:ea typeface="Calibri" pitchFamily="34" charset="-122"/>
                 <a:cs typeface="Calibri" pitchFamily="34" charset="-120"/>
               </a:rPr>
+              <a:t>HOMEWORK</a:t>
+            </a:r>
+            <a:endParaRPr lang="en-US" sz="1400" dirty="0"/>
+          </a:p>
+        </p:txBody>
+      </p:sp>
+      <p:pic>
+        <p:nvPicPr>
+          <p:cNvPr id="3" name="Image 0" descr="/home/claude/f4/img/minesec_sheet.png">    </p:cNvPr>
+          <p:cNvPicPr>
+            <a:picLocks noChangeAspect="1"/>
+          </p:cNvPicPr>
+          <p:nvPr/>
+        </p:nvPicPr>
+        <p:blipFill>
+          <a:blip r:embed="rId1"/>
+          <a:stretch>
+            <a:fillRect/>
+          </a:stretch>
+        </p:blipFill>
+        <p:spPr>
+          <a:xfrm>
+            <a:off x="0" y="658368"/>
+            <a:ext cx="5120640" cy="5833872"/>
+          </a:xfrm>
+          <a:prstGeom prst="rect">
+            <a:avLst/>
+          </a:prstGeom>
+        </p:spPr>
+      </p:pic>
+      <p:sp>
+        <p:nvSpPr>
+          <p:cNvPr id="4" name="Text 1"/>
+          <p:cNvSpPr/>
+          <p:nvPr/>
+        </p:nvSpPr>
+        <p:spPr>
+          <a:xfrm>
+            <a:off x="5349240" y="1005840"/>
+            <a:ext cx="6522415" cy="731520"/>
+          </a:xfrm>
+          <a:prstGeom prst="rect">
+            <a:avLst/>
+          </a:prstGeom>
+          <a:noFill/>
+          <a:ln/>
+        </p:spPr>
+        <p:txBody>
+          <a:bodyPr wrap="square" lIns="0" tIns="0" rIns="0" bIns="0" rtlCol="0" anchor="ctr">
+            <a:normAutofit/>
+          </a:bodyPr>
+          <a:lstStyle/>
+          <a:p>
+            <a:pPr algn="ctr" indent="0" marL="0">
+              <a:buNone/>
+            </a:pPr>
+            <a:r>
+              <a:rPr lang="en-US" sz="3600" b="1" dirty="0">
+                <a:solidFill>
+                  <a:srgbClr val="990011"/>
+                </a:solidFill>
+                <a:latin typeface="Times New Roman" pitchFamily="34" charset="0"/>
+                <a:ea typeface="Times New Roman" pitchFamily="34" charset="-122"/>
+                <a:cs typeface="Times New Roman" pitchFamily="34" charset="-120"/>
+              </a:rPr>
+              <a:t>Homework</a:t>
+            </a:r>
+            <a:endParaRPr lang="en-US" sz="3600" dirty="0"/>
+          </a:p>
+        </p:txBody>
+      </p:sp>
+      <p:sp>
+        <p:nvSpPr>
+          <p:cNvPr id="5" name="Text 2"/>
+          <p:cNvSpPr/>
+          <p:nvPr/>
+        </p:nvSpPr>
+        <p:spPr>
+          <a:xfrm>
+            <a:off x="5349240" y="1783080"/>
+            <a:ext cx="6522415" cy="4663440"/>
+          </a:xfrm>
+          <a:prstGeom prst="rect">
+            <a:avLst/>
+          </a:prstGeom>
+          <a:noFill/>
+          <a:ln/>
+        </p:spPr>
+        <p:txBody>
+          <a:bodyPr wrap="square" lIns="0" tIns="0" rIns="0" bIns="0" rtlCol="0" anchor="t"/>
+          <a:lstStyle/>
+          <a:p>
+            <a:pPr algn="l" indent="0" marL="0">
+              <a:spcAft>
+                <a:spcPts val="800"/>
+              </a:spcAft>
+              <a:buNone/>
+            </a:pPr>
+            <a:r>
+              <a:rPr lang="en-US" sz="4000" dirty="0">
+                <a:solidFill>
+                  <a:srgbClr val="111111"/>
+                </a:solidFill>
+                <a:latin typeface="Times New Roman" pitchFamily="34" charset="0"/>
+                <a:ea typeface="Times New Roman" pitchFamily="34" charset="-122"/>
+                <a:cs typeface="Times New Roman" pitchFamily="34" charset="-120"/>
+              </a:rPr>
+              <a:t>Identify two types of pollution in your town, their sources and one solution for each.</a:t>
+            </a:r>
+            <a:endParaRPr lang="en-US" sz="4000" dirty="0"/>
+          </a:p>
+        </p:txBody>
+      </p:sp>
+      <p:sp>
+        <p:nvSpPr>
+          <p:cNvPr id="25" name="Slide Number Placeholder 0"/>
+          <p:cNvSpPr>
+            <a:spLocks noGrp="1"/>
+          </p:cNvSpPr>
+          <p:nvPr>
+            <p:ph type="sldNum" sz="quarter" idx="4294967295"/>
+          </p:nvPr>
+        </p:nvSpPr>
+        <p:spPr>
+          <a:xfrm>
+            <a:off x="27432" y="91440"/>
+            <a:ext cx="585216" cy="475488"/>
+          </a:xfrm>
+          <a:prstGeom prst="rect">
+            <a:avLst/>
+          </a:prstGeom>
+          <a:extLst>
+            <a:ext uri="{C572A759-6A51-4108-AA02-DFA0A04FC94B}">
+              <ma14:wrappingTextBoxFlag xmlns:ma14="http://schemas.microsoft.com/office/mac/drawingml/2011/main" val="0"/>
+            </a:ext>
+          </a:extLst>
+        </p:spPr>
+        <p:txBody>
+          <a:bodyPr/>
+          <a:lstStyle>
+            <a:lvl1pPr>
+              <a:defRPr sz="2000">
+                <a:solidFill>
+                  <a:srgbClr val="FFFFFF"/>
+                </a:solidFill>
+                <a:latin typeface="Calibri"/>
+                <a:ea typeface="Calibri"/>
+                <a:cs typeface="Calibri"/>
+              </a:defRPr>
+            </a:lvl1pPr>
+          </a:lstStyle>
+          <a:p>
+            <a:pPr algn="ctr"/>
+            <a:fld id="{F7021451-1387-4CA6-816F-3879F97B5CBC}" type="slidenum">
+              <a:rPr b="1" lang="en-US"/>
+              <a:t>48</a:t>
+            </a:fld>
+            <a:endParaRPr lang="en-US"/>
+          </a:p>
+        </p:txBody>
+      </p:sp>
+    </p:spTree>
+  </p:cSld>
+  <p:clrMapOvr>
+    <a:masterClrMapping/>
+  </p:clrMapOvr>
+</p:sld>
+</file>
+
+<file path=ppt/slides/slide49.xml><?xml version="1.0" encoding="utf-8"?>
+<p:sld xmlns:a="http://schemas.openxmlformats.org/drawingml/2006/main" xmlns:r="http://schemas.openxmlformats.org/officeDocument/2006/relationships" xmlns:p="http://schemas.openxmlformats.org/presentationml/2006/main">
+  <p:cSld name="Slide 49">
+    <p:spTree>
+      <p:nvGrpSpPr>
+        <p:cNvPr id="1" name=""/>
+        <p:cNvGrpSpPr/>
+        <p:nvPr/>
+      </p:nvGrpSpPr>
+      <p:grpSpPr>
+        <a:xfrm>
+          <a:off x="0" y="0"/>
+          <a:ext cx="0" cy="0"/>
+          <a:chOff x="0" y="0"/>
+          <a:chExt cx="0" cy="0"/>
+        </a:xfrm>
+      </p:grpSpPr>
+      <p:sp>
+        <p:nvSpPr>
+          <p:cNvPr id="2" name="Text 0"/>
+          <p:cNvSpPr/>
+          <p:nvPr/>
+        </p:nvSpPr>
+        <p:spPr>
+          <a:xfrm>
+            <a:off x="457200" y="713232"/>
+            <a:ext cx="11368735" cy="274320"/>
+          </a:xfrm>
+          <a:prstGeom prst="rect">
+            <a:avLst/>
+          </a:prstGeom>
+          <a:noFill/>
+          <a:ln/>
+        </p:spPr>
+        <p:txBody>
+          <a:bodyPr wrap="square" lIns="0" tIns="0" rIns="0" bIns="0" rtlCol="0" anchor="ctr"/>
+          <a:lstStyle/>
+          <a:p>
+            <a:pPr algn="r" indent="0" marL="0">
+              <a:buNone/>
+            </a:pPr>
+            <a:r>
+              <a:rPr lang="en-US" sz="1400" b="1" dirty="0">
+                <a:solidFill>
+                  <a:srgbClr val="1C3F6E"/>
+                </a:solidFill>
+                <a:latin typeface="Calibri" pitchFamily="34" charset="0"/>
+                <a:ea typeface="Calibri" pitchFamily="34" charset="-122"/>
+                <a:cs typeface="Calibri" pitchFamily="34" charset="-120"/>
+              </a:rPr>
+              <a:t>NEXT LESSON</a:t>
+            </a:r>
+            <a:endParaRPr lang="en-US" sz="1400" dirty="0"/>
+          </a:p>
+        </p:txBody>
+      </p:sp>
+      <p:pic>
+        <p:nvPicPr>
+          <p:cNvPr id="3" name="Image 0" descr="/home/claude/f4/img/minesec_sheet.png">    </p:cNvPr>
+          <p:cNvPicPr>
+            <a:picLocks noChangeAspect="1"/>
+          </p:cNvPicPr>
+          <p:nvPr/>
+        </p:nvPicPr>
+        <p:blipFill>
+          <a:blip r:embed="rId1"/>
+          <a:stretch>
+            <a:fillRect/>
+          </a:stretch>
+        </p:blipFill>
+        <p:spPr>
+          <a:xfrm>
+            <a:off x="0" y="658368"/>
+            <a:ext cx="5120640" cy="5833872"/>
+          </a:xfrm>
+          <a:prstGeom prst="rect">
+            <a:avLst/>
+          </a:prstGeom>
+        </p:spPr>
+      </p:pic>
+      <p:sp>
+        <p:nvSpPr>
+          <p:cNvPr id="4" name="Text 1"/>
+          <p:cNvSpPr/>
+          <p:nvPr/>
+        </p:nvSpPr>
+        <p:spPr>
+          <a:xfrm>
+            <a:off x="5349240" y="1005840"/>
+            <a:ext cx="6522415" cy="731520"/>
+          </a:xfrm>
+          <a:prstGeom prst="rect">
+            <a:avLst/>
+          </a:prstGeom>
+          <a:noFill/>
+          <a:ln/>
+        </p:spPr>
+        <p:txBody>
+          <a:bodyPr wrap="square" lIns="0" tIns="0" rIns="0" bIns="0" rtlCol="0" anchor="ctr">
+            <a:normAutofit/>
+          </a:bodyPr>
+          <a:lstStyle/>
+          <a:p>
+            <a:pPr algn="ctr" indent="0" marL="0">
+              <a:buNone/>
+            </a:pPr>
+            <a:r>
+              <a:rPr lang="en-US" sz="3600" b="1" dirty="0">
+                <a:solidFill>
+                  <a:srgbClr val="990011"/>
+                </a:solidFill>
+                <a:latin typeface="Times New Roman" pitchFamily="34" charset="0"/>
+                <a:ea typeface="Times New Roman" pitchFamily="34" charset="-122"/>
+                <a:cs typeface="Times New Roman" pitchFamily="34" charset="-120"/>
+              </a:rPr>
+              <a:t>Next Lesson</a:t>
+            </a:r>
+            <a:endParaRPr lang="en-US" sz="3600" dirty="0"/>
+          </a:p>
+        </p:txBody>
+      </p:sp>
+      <p:sp>
+        <p:nvSpPr>
+          <p:cNvPr id="5" name="Text 2"/>
+          <p:cNvSpPr/>
+          <p:nvPr/>
+        </p:nvSpPr>
+        <p:spPr>
+          <a:xfrm>
+            <a:off x="5349240" y="1783080"/>
+            <a:ext cx="6522415" cy="4663440"/>
+          </a:xfrm>
+          <a:prstGeom prst="rect">
+            <a:avLst/>
+          </a:prstGeom>
+          <a:noFill/>
+          <a:ln/>
+        </p:spPr>
+        <p:txBody>
+          <a:bodyPr wrap="square" lIns="0" tIns="0" rIns="0" bIns="0" rtlCol="0" anchor="ctr"/>
+          <a:lstStyle/>
+          <a:p>
+            <a:pPr algn="ctr" indent="0" marL="0">
+              <a:spcAft>
+                <a:spcPts val="800"/>
+              </a:spcAft>
+              <a:buNone/>
+            </a:pPr>
+            <a:r>
+              <a:rPr lang="en-US" sz="4000" b="1" dirty="0">
+                <a:solidFill>
+                  <a:srgbClr val="111111"/>
+                </a:solidFill>
+                <a:latin typeface="Times New Roman" pitchFamily="34" charset="0"/>
+                <a:ea typeface="Times New Roman" pitchFamily="34" charset="-122"/>
+                <a:cs typeface="Times New Roman" pitchFamily="34" charset="-120"/>
+              </a:rPr>
+              <a:t>Our next lesson will be on:</a:t>
+            </a:r>
+            <a:endParaRPr lang="en-US" sz="4000" dirty="0"/>
+          </a:p>
+          <a:p>
+            <a:pPr algn="ctr" indent="0" marL="0">
+              <a:spcAft>
+                <a:spcPts val="800"/>
+              </a:spcAft>
+              <a:buNone/>
+            </a:pPr>
+            <a:r>
+              <a:rPr lang="en-US" sz="4000" b="1" dirty="0">
+                <a:solidFill>
+                  <a:srgbClr val="990011"/>
+                </a:solidFill>
+                <a:latin typeface="Times New Roman" pitchFamily="34" charset="0"/>
+                <a:ea typeface="Times New Roman" pitchFamily="34" charset="-122"/>
+                <a:cs typeface="Times New Roman" pitchFamily="34" charset="-120"/>
+              </a:rPr>
+              <a:t>Lesson 28: Basic Notions on Population</a:t>
+            </a:r>
+            <a:endParaRPr lang="en-US" sz="4000" dirty="0"/>
+          </a:p>
+        </p:txBody>
+      </p:sp>
+      <p:sp>
+        <p:nvSpPr>
+          <p:cNvPr id="25" name="Slide Number Placeholder 0"/>
+          <p:cNvSpPr>
+            <a:spLocks noGrp="1"/>
+          </p:cNvSpPr>
+          <p:nvPr>
+            <p:ph type="sldNum" sz="quarter" idx="4294967295"/>
+          </p:nvPr>
+        </p:nvSpPr>
+        <p:spPr>
+          <a:xfrm>
+            <a:off x="27432" y="91440"/>
+            <a:ext cx="585216" cy="475488"/>
+          </a:xfrm>
+          <a:prstGeom prst="rect">
+            <a:avLst/>
+          </a:prstGeom>
+          <a:extLst>
+            <a:ext uri="{C572A759-6A51-4108-AA02-DFA0A04FC94B}">
+              <ma14:wrappingTextBoxFlag xmlns:ma14="http://schemas.microsoft.com/office/mac/drawingml/2011/main" val="0"/>
+            </a:ext>
+          </a:extLst>
+        </p:spPr>
+        <p:txBody>
+          <a:bodyPr/>
+          <a:lstStyle>
+            <a:lvl1pPr>
+              <a:defRPr sz="2000">
+                <a:solidFill>
+                  <a:srgbClr val="FFFFFF"/>
+                </a:solidFill>
+                <a:latin typeface="Calibri"/>
+                <a:ea typeface="Calibri"/>
+                <a:cs typeface="Calibri"/>
+              </a:defRPr>
+            </a:lvl1pPr>
+          </a:lstStyle>
+          <a:p>
+            <a:pPr algn="ctr"/>
+            <a:fld id="{F7021451-1387-4CA6-816F-3879F97B5CBC}" type="slidenum">
+              <a:rPr b="1" lang="en-US"/>
+              <a:t>49</a:t>
+            </a:fld>
+            <a:endParaRPr lang="en-US"/>
+          </a:p>
+        </p:txBody>
+      </p:sp>
+    </p:spTree>
+  </p:cSld>
+  <p:clrMapOvr>
+    <a:masterClrMapping/>
+  </p:clrMapOvr>
+</p:sld>
+</file>
+
+<file path=ppt/slides/slide5.xml><?xml version="1.0" encoding="utf-8"?>
+<p:sld xmlns:a="http://schemas.openxmlformats.org/drawingml/2006/main" xmlns:r="http://schemas.openxmlformats.org/officeDocument/2006/relationships" xmlns:p="http://schemas.openxmlformats.org/presentationml/2006/main">
+  <p:cSld name="Slide 5">
+    <p:spTree>
+      <p:nvGrpSpPr>
+        <p:cNvPr id="1" name=""/>
+        <p:cNvGrpSpPr/>
+        <p:nvPr/>
+      </p:nvGrpSpPr>
+      <p:grpSpPr>
+        <a:xfrm>
+          <a:off x="0" y="0"/>
+          <a:ext cx="0" cy="0"/>
+          <a:chOff x="0" y="0"/>
+          <a:chExt cx="0" cy="0"/>
+        </a:xfrm>
+      </p:grpSpPr>
+      <p:sp>
+        <p:nvSpPr>
+          <p:cNvPr id="2" name="Text 0"/>
+          <p:cNvSpPr/>
+          <p:nvPr/>
+        </p:nvSpPr>
+        <p:spPr>
+          <a:xfrm>
+            <a:off x="457200" y="713232"/>
+            <a:ext cx="11368735" cy="274320"/>
+          </a:xfrm>
+          <a:prstGeom prst="rect">
+            <a:avLst/>
+          </a:prstGeom>
+          <a:noFill/>
+          <a:ln/>
+        </p:spPr>
+        <p:txBody>
+          <a:bodyPr wrap="square" lIns="0" tIns="0" rIns="0" bIns="0" rtlCol="0" anchor="ctr"/>
+          <a:lstStyle/>
+          <a:p>
+            <a:pPr algn="r" indent="0" marL="0">
+              <a:buNone/>
+            </a:pPr>
+            <a:r>
+              <a:rPr lang="en-US" sz="1400" b="1" dirty="0">
+                <a:solidFill>
+                  <a:srgbClr val="1C3F6E"/>
+                </a:solidFill>
+                <a:latin typeface="Calibri" pitchFamily="34" charset="0"/>
+                <a:ea typeface="Calibri" pitchFamily="34" charset="-122"/>
+                <a:cs typeface="Calibri" pitchFamily="34" charset="-120"/>
+              </a:rPr>
+              <a:t>HOMEWORK CORRECTION</a:t>
+            </a:r>
+            <a:endParaRPr lang="en-US" sz="1400" dirty="0"/>
+          </a:p>
+        </p:txBody>
+      </p:sp>
+      <p:pic>
+        <p:nvPicPr>
+          <p:cNvPr id="3" name="Image 0" descr="/home/claude/f4/img/minesec_sheet.png">    </p:cNvPr>
+          <p:cNvPicPr>
+            <a:picLocks noChangeAspect="1"/>
+          </p:cNvPicPr>
+          <p:nvPr/>
+        </p:nvPicPr>
+        <p:blipFill>
+          <a:blip r:embed="rId1"/>
+          <a:stretch>
+            <a:fillRect/>
+          </a:stretch>
+        </p:blipFill>
+        <p:spPr>
+          <a:xfrm>
+            <a:off x="0" y="658368"/>
+            <a:ext cx="5120640" cy="5833872"/>
+          </a:xfrm>
+          <a:prstGeom prst="rect">
+            <a:avLst/>
+          </a:prstGeom>
+        </p:spPr>
+      </p:pic>
+      <p:sp>
+        <p:nvSpPr>
+          <p:cNvPr id="4" name="Text 1"/>
+          <p:cNvSpPr/>
+          <p:nvPr/>
+        </p:nvSpPr>
+        <p:spPr>
+          <a:xfrm>
+            <a:off x="5349240" y="1005840"/>
+            <a:ext cx="6522415" cy="731520"/>
+          </a:xfrm>
+          <a:prstGeom prst="rect">
+            <a:avLst/>
+          </a:prstGeom>
+          <a:noFill/>
+          <a:ln/>
+        </p:spPr>
+        <p:txBody>
+          <a:bodyPr wrap="square" lIns="0" tIns="0" rIns="0" bIns="0" rtlCol="0" anchor="ctr">
+            <a:normAutofit/>
+          </a:bodyPr>
+          <a:lstStyle/>
+          <a:p>
+            <a:pPr algn="ctr" indent="0" marL="0">
+              <a:buNone/>
+            </a:pPr>
+            <a:r>
+              <a:rPr lang="en-US" sz="3600" b="1" dirty="0">
+                <a:solidFill>
+                  <a:srgbClr val="990011"/>
+                </a:solidFill>
+                <a:latin typeface="Times New Roman" pitchFamily="34" charset="0"/>
+                <a:ea typeface="Times New Roman" pitchFamily="34" charset="-122"/>
+                <a:cs typeface="Times New Roman" pitchFamily="34" charset="-120"/>
+              </a:rPr>
+              <a:t>Correction: Possible Answer</a:t>
+            </a:r>
+            <a:endParaRPr lang="en-US" sz="3600" dirty="0"/>
+          </a:p>
+        </p:txBody>
+      </p:sp>
+      <p:sp>
+        <p:nvSpPr>
+          <p:cNvPr id="5" name="Text 2"/>
+          <p:cNvSpPr/>
+          <p:nvPr/>
+        </p:nvSpPr>
+        <p:spPr>
+          <a:xfrm>
+            <a:off x="5349240" y="1783080"/>
+            <a:ext cx="6522415" cy="4663440"/>
+          </a:xfrm>
+          <a:prstGeom prst="rect">
+            <a:avLst/>
+          </a:prstGeom>
+          <a:noFill/>
+          <a:ln/>
+        </p:spPr>
+        <p:txBody>
+          <a:bodyPr wrap="square" lIns="0" tIns="0" rIns="0" bIns="0" rtlCol="0" anchor="t"/>
+          <a:lstStyle/>
+          <a:p>
+            <a:pPr algn="l" indent="0" marL="0">
+              <a:spcAft>
+                <a:spcPts val="800"/>
+              </a:spcAft>
+              <a:buNone/>
+            </a:pPr>
+            <a:r>
+              <a:rPr lang="en-US" sz="4000" dirty="0">
+                <a:solidFill>
+                  <a:srgbClr val="111111"/>
+                </a:solidFill>
+                <a:latin typeface="Times New Roman" pitchFamily="34" charset="0"/>
+                <a:ea typeface="Times New Roman" pitchFamily="34" charset="-122"/>
+                <a:cs typeface="Times New Roman" pitchFamily="34" charset="-120"/>
+              </a:rPr>
+              <a:t>Example: waste is burnt or dumped in gutters; provide bins, organise collection with HYSACAM or the council, and sort plastics for recycling.</a:t>
+            </a:r>
+            <a:endParaRPr lang="en-US" sz="4000" dirty="0"/>
+          </a:p>
+        </p:txBody>
+      </p:sp>
+      <p:sp>
+        <p:nvSpPr>
+          <p:cNvPr id="25" name="Slide Number Placeholder 0"/>
+          <p:cNvSpPr>
+            <a:spLocks noGrp="1"/>
+          </p:cNvSpPr>
+          <p:nvPr>
+            <p:ph type="sldNum" sz="quarter" idx="4294967295"/>
+          </p:nvPr>
+        </p:nvSpPr>
+        <p:spPr>
+          <a:xfrm>
+            <a:off x="27432" y="91440"/>
+            <a:ext cx="585216" cy="475488"/>
+          </a:xfrm>
+          <a:prstGeom prst="rect">
+            <a:avLst/>
+          </a:prstGeom>
+          <a:extLst>
+            <a:ext uri="{C572A759-6A51-4108-AA02-DFA0A04FC94B}">
+              <ma14:wrappingTextBoxFlag xmlns:ma14="http://schemas.microsoft.com/office/mac/drawingml/2011/main" val="0"/>
+            </a:ext>
+          </a:extLst>
+        </p:spPr>
+        <p:txBody>
+          <a:bodyPr/>
+          <a:lstStyle>
+            <a:lvl1pPr>
+              <a:defRPr sz="2000">
+                <a:solidFill>
+                  <a:srgbClr val="FFFFFF"/>
+                </a:solidFill>
+                <a:latin typeface="Calibri"/>
+                <a:ea typeface="Calibri"/>
+                <a:cs typeface="Calibri"/>
+              </a:defRPr>
+            </a:lvl1pPr>
+          </a:lstStyle>
+          <a:p>
+            <a:pPr algn="ctr"/>
+            <a:fld id="{F7021451-1387-4CA6-816F-3879F97B5CBC}" type="slidenum">
+              <a:rPr b="1" lang="en-US"/>
+              <a:t>5</a:t>
+            </a:fld>
+            <a:endParaRPr lang="en-US"/>
+          </a:p>
+        </p:txBody>
+      </p:sp>
+    </p:spTree>
+  </p:cSld>
+  <p:clrMapOvr>
+    <a:masterClrMapping/>
+  </p:clrMapOvr>
+</p:sld>
+</file>
+
+<file path=ppt/slides/slide50.xml><?xml version="1.0" encoding="utf-8"?>
+<p:sld xmlns:a="http://schemas.openxmlformats.org/drawingml/2006/main" xmlns:r="http://schemas.openxmlformats.org/officeDocument/2006/relationships" xmlns:p="http://schemas.openxmlformats.org/presentationml/2006/main">
+  <p:cSld name="Slide 50">
+    <p:spTree>
+      <p:nvGrpSpPr>
+        <p:cNvPr id="1" name=""/>
+        <p:cNvGrpSpPr/>
+        <p:nvPr/>
+      </p:nvGrpSpPr>
+      <p:grpSpPr>
+        <a:xfrm>
+          <a:off x="0" y="0"/>
+          <a:ext cx="0" cy="0"/>
+          <a:chOff x="0" y="0"/>
+          <a:chExt cx="0" cy="0"/>
+        </a:xfrm>
+      </p:grpSpPr>
+      <p:sp>
+        <p:nvSpPr>
+          <p:cNvPr id="2" name="Text 0"/>
+          <p:cNvSpPr/>
+          <p:nvPr/>
+        </p:nvSpPr>
+        <p:spPr>
+          <a:xfrm>
+            <a:off x="457200" y="713232"/>
+            <a:ext cx="11368735" cy="274320"/>
+          </a:xfrm>
+          <a:prstGeom prst="rect">
+            <a:avLst/>
+          </a:prstGeom>
+          <a:noFill/>
+          <a:ln/>
+        </p:spPr>
+        <p:txBody>
+          <a:bodyPr wrap="square" lIns="0" tIns="0" rIns="0" bIns="0" rtlCol="0" anchor="ctr"/>
+          <a:lstStyle/>
+          <a:p>
+            <a:pPr algn="r" indent="0" marL="0">
+              <a:buNone/>
+            </a:pPr>
+            <a:r>
+              <a:rPr lang="en-US" sz="1400" b="1" dirty="0">
+                <a:solidFill>
+                  <a:srgbClr val="1C3F6E"/>
+                </a:solidFill>
+                <a:latin typeface="Calibri" pitchFamily="34" charset="0"/>
+                <a:ea typeface="Calibri" pitchFamily="34" charset="-122"/>
+                <a:cs typeface="Calibri" pitchFamily="34" charset="-120"/>
+              </a:rPr>
               <a:t>BILINGUAL GAME</a:t>
             </a:r>
             <a:endParaRPr lang="en-US" sz="1400" dirty="0"/>
@@ -16962,7 +18118,7 @@
       </p:sp>
       <p:graphicFrame>
         <p:nvGraphicFramePr>
-          <p:cNvPr id="49" name="Table 0"/>
+          <p:cNvPr id="51" name="Table 0"/>
           <p:cNvGraphicFramePr>
             <a:graphicFrameLocks noGrp="1"/>
           </p:cNvGraphicFramePr>
@@ -17998,7 +19154,7 @@
             <a:pPr algn="ctr"/>
             <a:fld id="{F7021451-1387-4CA6-816F-3879F97B5CBC}" type="slidenum">
               <a:rPr b="1" lang="en-US"/>
-              <a:t>48</a:t>
+              <a:t>50</a:t>
             </a:fld>
             <a:endParaRPr lang="en-US"/>
           </a:p>
@@ -18012,9 +19168,9 @@
 </p:sld>
 </file>
 
-<file path=ppt/slides/slide49.xml><?xml version="1.0" encoding="utf-8"?>
+<file path=ppt/slides/slide51.xml><?xml version="1.0" encoding="utf-8"?>
 <p:sld xmlns:a="http://schemas.openxmlformats.org/drawingml/2006/main" xmlns:r="http://schemas.openxmlformats.org/officeDocument/2006/relationships" xmlns:p="http://schemas.openxmlformats.org/presentationml/2006/main">
-  <p:cSld name="Slide 49">
+  <p:cSld name="Slide 51">
     <p:spTree>
       <p:nvGrpSpPr>
         <p:cNvPr id="1" name=""/>
@@ -18109,7 +19265,7 @@
       </p:sp>
       <p:graphicFrame>
         <p:nvGraphicFramePr>
-          <p:cNvPr id="50" name="Table 0"/>
+          <p:cNvPr id="52" name="Table 0"/>
           <p:cNvGraphicFramePr>
             <a:graphicFrameLocks noGrp="1"/>
           </p:cNvGraphicFramePr>
@@ -18731,7 +19887,7 @@
             <a:pPr algn="ctr"/>
             <a:fld id="{F7021451-1387-4CA6-816F-3879F97B5CBC}" type="slidenum">
               <a:rPr b="1" lang="en-US"/>
-              <a:t>49</a:t>
+              <a:t>51</a:t>
             </a:fld>
             <a:endParaRPr lang="en-US"/>
           </a:p>
@@ -18745,9 +19901,9 @@
 </p:sld>
 </file>
 
-<file path=ppt/slides/slide5.xml><?xml version="1.0" encoding="utf-8"?>
+<file path=ppt/slides/slide52.xml><?xml version="1.0" encoding="utf-8"?>
 <p:sld xmlns:a="http://schemas.openxmlformats.org/drawingml/2006/main" xmlns:r="http://schemas.openxmlformats.org/officeDocument/2006/relationships" xmlns:p="http://schemas.openxmlformats.org/presentationml/2006/main">
-  <p:cSld name="Slide 5">
+  <p:cSld name="Slide 52">
     <p:spTree>
       <p:nvGrpSpPr>
         <p:cNvPr id="1" name=""/>
@@ -18795,225 +19951,6 @@
                 <a:ea typeface="Calibri" pitchFamily="34" charset="-122"/>
                 <a:cs typeface="Calibri" pitchFamily="34" charset="-120"/>
               </a:rPr>
-              <a:t>HOMEWORK CORRECTION</a:t>
-            </a:r>
-            <a:endParaRPr lang="en-US" sz="1400" dirty="0"/>
-          </a:p>
-        </p:txBody>
-      </p:sp>
-      <p:pic>
-        <p:nvPicPr>
-          <p:cNvPr id="3" name="Image 0" descr="/home/claude/f4/img/minesec_sheet.png">    </p:cNvPr>
-          <p:cNvPicPr>
-            <a:picLocks noChangeAspect="1"/>
-          </p:cNvPicPr>
-          <p:nvPr/>
-        </p:nvPicPr>
-        <p:blipFill>
-          <a:blip r:embed="rId1"/>
-          <a:stretch>
-            <a:fillRect/>
-          </a:stretch>
-        </p:blipFill>
-        <p:spPr>
-          <a:xfrm>
-            <a:off x="0" y="658368"/>
-            <a:ext cx="5120640" cy="5833872"/>
-          </a:xfrm>
-          <a:prstGeom prst="rect">
-            <a:avLst/>
-          </a:prstGeom>
-        </p:spPr>
-      </p:pic>
-      <p:sp>
-        <p:nvSpPr>
-          <p:cNvPr id="4" name="Text 1"/>
-          <p:cNvSpPr/>
-          <p:nvPr/>
-        </p:nvSpPr>
-        <p:spPr>
-          <a:xfrm>
-            <a:off x="5349240" y="1005840"/>
-            <a:ext cx="6522415" cy="731520"/>
-          </a:xfrm>
-          <a:prstGeom prst="rect">
-            <a:avLst/>
-          </a:prstGeom>
-          <a:noFill/>
-          <a:ln/>
-        </p:spPr>
-        <p:txBody>
-          <a:bodyPr wrap="square" lIns="0" tIns="0" rIns="0" bIns="0" rtlCol="0" anchor="ctr">
-            <a:normAutofit/>
-          </a:bodyPr>
-          <a:lstStyle/>
-          <a:p>
-            <a:pPr algn="ctr" indent="0" marL="0">
-              <a:buNone/>
-            </a:pPr>
-            <a:r>
-              <a:rPr lang="en-US" sz="3600" b="1" dirty="0">
-                <a:solidFill>
-                  <a:srgbClr val="990011"/>
-                </a:solidFill>
-                <a:latin typeface="Times New Roman" pitchFamily="34" charset="0"/>
-                <a:ea typeface="Times New Roman" pitchFamily="34" charset="-122"/>
-                <a:cs typeface="Times New Roman" pitchFamily="34" charset="-120"/>
-              </a:rPr>
-              <a:t>Correction: Possible Answer</a:t>
-            </a:r>
-            <a:endParaRPr lang="en-US" sz="3600" dirty="0"/>
-          </a:p>
-        </p:txBody>
-      </p:sp>
-      <p:sp>
-        <p:nvSpPr>
-          <p:cNvPr id="5" name="Text 2"/>
-          <p:cNvSpPr/>
-          <p:nvPr/>
-        </p:nvSpPr>
-        <p:spPr>
-          <a:xfrm>
-            <a:off x="5349240" y="1783080"/>
-            <a:ext cx="6522415" cy="4663440"/>
-          </a:xfrm>
-          <a:prstGeom prst="rect">
-            <a:avLst/>
-          </a:prstGeom>
-          <a:noFill/>
-          <a:ln/>
-        </p:spPr>
-        <p:txBody>
-          <a:bodyPr wrap="square" lIns="0" tIns="0" rIns="0" bIns="0" rtlCol="0" anchor="t"/>
-          <a:lstStyle/>
-          <a:p>
-            <a:pPr algn="l" indent="0" marL="0">
-              <a:spcAft>
-                <a:spcPts val="800"/>
-              </a:spcAft>
-              <a:buNone/>
-            </a:pPr>
-            <a:r>
-              <a:rPr lang="en-US" sz="4000" dirty="0">
-                <a:solidFill>
-                  <a:srgbClr val="111111"/>
-                </a:solidFill>
-                <a:latin typeface="Times New Roman" pitchFamily="34" charset="0"/>
-                <a:ea typeface="Times New Roman" pitchFamily="34" charset="-122"/>
-                <a:cs typeface="Times New Roman" pitchFamily="34" charset="-120"/>
-              </a:rPr>
-              <a:t>Example: waste is burnt or dumped in gutters; provide bins, organise collection with HYSACAM or the council, and sort plastics for recycling.</a:t>
-            </a:r>
-            <a:endParaRPr lang="en-US" sz="4000" dirty="0"/>
-          </a:p>
-        </p:txBody>
-      </p:sp>
-      <p:sp>
-        <p:nvSpPr>
-          <p:cNvPr id="25" name="Slide Number Placeholder 0"/>
-          <p:cNvSpPr>
-            <a:spLocks noGrp="1"/>
-          </p:cNvSpPr>
-          <p:nvPr>
-            <p:ph type="sldNum" sz="quarter" idx="4294967295"/>
-          </p:nvPr>
-        </p:nvSpPr>
-        <p:spPr>
-          <a:xfrm>
-            <a:off x="27432" y="91440"/>
-            <a:ext cx="585216" cy="475488"/>
-          </a:xfrm>
-          <a:prstGeom prst="rect">
-            <a:avLst/>
-          </a:prstGeom>
-          <a:extLst>
-            <a:ext uri="{C572A759-6A51-4108-AA02-DFA0A04FC94B}">
-              <ma14:wrappingTextBoxFlag xmlns:ma14="http://schemas.microsoft.com/office/mac/drawingml/2011/main" val="0"/>
-            </a:ext>
-          </a:extLst>
-        </p:spPr>
-        <p:txBody>
-          <a:bodyPr/>
-          <a:lstStyle>
-            <a:lvl1pPr>
-              <a:defRPr sz="2000">
-                <a:solidFill>
-                  <a:srgbClr val="FFFFFF"/>
-                </a:solidFill>
-                <a:latin typeface="Calibri"/>
-                <a:ea typeface="Calibri"/>
-                <a:cs typeface="Calibri"/>
-              </a:defRPr>
-            </a:lvl1pPr>
-          </a:lstStyle>
-          <a:p>
-            <a:pPr algn="ctr"/>
-            <a:fld id="{F7021451-1387-4CA6-816F-3879F97B5CBC}" type="slidenum">
-              <a:rPr b="1" lang="en-US"/>
-              <a:t>5</a:t>
-            </a:fld>
-            <a:endParaRPr lang="en-US"/>
-          </a:p>
-        </p:txBody>
-      </p:sp>
-    </p:spTree>
-  </p:cSld>
-  <p:clrMapOvr>
-    <a:masterClrMapping/>
-  </p:clrMapOvr>
-</p:sld>
-</file>
-
-<file path=ppt/slides/slide50.xml><?xml version="1.0" encoding="utf-8"?>
-<p:sld xmlns:a="http://schemas.openxmlformats.org/drawingml/2006/main" xmlns:r="http://schemas.openxmlformats.org/officeDocument/2006/relationships" xmlns:p="http://schemas.openxmlformats.org/presentationml/2006/main">
-  <p:cSld name="Slide 50">
-    <p:spTree>
-      <p:nvGrpSpPr>
-        <p:cNvPr id="1" name=""/>
-        <p:cNvGrpSpPr/>
-        <p:nvPr/>
-      </p:nvGrpSpPr>
-      <p:grpSpPr>
-        <a:xfrm>
-          <a:off x="0" y="0"/>
-          <a:ext cx="0" cy="0"/>
-          <a:chOff x="0" y="0"/>
-          <a:chExt cx="0" cy="0"/>
-        </a:xfrm>
-      </p:grpSpPr>
-      <p:sp>
-        <p:nvSpPr>
-          <p:cNvPr id="2" name="Text 0"/>
-          <p:cNvSpPr/>
-          <p:nvPr/>
-        </p:nvSpPr>
-        <p:spPr>
-          <a:xfrm>
-            <a:off x="457200" y="713232"/>
-            <a:ext cx="11368735" cy="274320"/>
-          </a:xfrm>
-          <a:prstGeom prst="rect">
-            <a:avLst/>
-          </a:prstGeom>
-          <a:noFill/>
-          <a:ln/>
-        </p:spPr>
-        <p:txBody>
-          <a:bodyPr wrap="square" lIns="0" tIns="0" rIns="0" bIns="0" rtlCol="0" anchor="ctr"/>
-          <a:lstStyle/>
-          <a:p>
-            <a:pPr algn="r" indent="0" marL="0">
-              <a:buNone/>
-            </a:pPr>
-            <a:r>
-              <a:rPr lang="en-US" sz="1400" b="1" dirty="0">
-                <a:solidFill>
-                  <a:srgbClr val="1C3F6E"/>
-                </a:solidFill>
-                <a:latin typeface="Calibri" pitchFamily="34" charset="0"/>
-                <a:ea typeface="Calibri" pitchFamily="34" charset="-122"/>
-                <a:cs typeface="Calibri" pitchFamily="34" charset="-120"/>
-              </a:rPr>
               <a:t>LOGBOOK</a:t>
             </a:r>
             <a:endParaRPr lang="en-US" sz="1400" dirty="0"/>
@@ -19061,7 +19998,7 @@
       </p:sp>
       <p:graphicFrame>
         <p:nvGraphicFramePr>
-          <p:cNvPr id="51" name="Table 0"/>
+          <p:cNvPr id="53" name="Table 0"/>
           <p:cNvGraphicFramePr>
             <a:graphicFrameLocks noGrp="1"/>
           </p:cNvGraphicFramePr>
@@ -19171,7 +20108,7 @@
                           <a:ea typeface="Calibri" pitchFamily="34" charset="-122"/>
                           <a:cs typeface="Calibri" pitchFamily="34" charset="-120"/>
                         </a:rPr>
-                        <a:t>DEFINITIONS; Types, Causes and Sources; Consequences and Solutions.</a:t>
+                        <a:t>DEFINITIONS; Types, Causes and Sources; Consequences; Solutions and Adaptation.</a:t>
                       </a:r>
                       <a:endParaRPr lang="en-US" sz="1600" dirty="0">
                         <a:latin typeface="Calibri" charset="0"/>
@@ -19821,7 +20758,7 @@
             <a:pPr algn="ctr"/>
             <a:fld id="{F7021451-1387-4CA6-816F-3879F97B5CBC}" type="slidenum">
               <a:rPr b="1" lang="en-US"/>
-              <a:t>50</a:t>
+              <a:t>52</a:t>
             </a:fld>
             <a:endParaRPr lang="en-US"/>
           </a:p>
@@ -19835,9 +20772,9 @@
 </p:sld>
 </file>
 
-<file path=ppt/slides/slide51.xml><?xml version="1.0" encoding="utf-8"?>
+<file path=ppt/slides/slide53.xml><?xml version="1.0" encoding="utf-8"?>
 <p:sld xmlns:a="http://schemas.openxmlformats.org/drawingml/2006/main" xmlns:r="http://schemas.openxmlformats.org/officeDocument/2006/relationships" xmlns:p="http://schemas.openxmlformats.org/presentationml/2006/main">
-  <p:cSld name="Slide 51">
+  <p:cSld name="Slide 53">
     <p:spTree>
       <p:nvGrpSpPr>
         <p:cNvPr id="1" name=""/>
@@ -20146,7 +21083,7 @@
             <a:pPr algn="ctr"/>
             <a:fld id="{F7021451-1387-4CA6-816F-3879F97B5CBC}" type="slidenum">
               <a:rPr b="1" lang="en-US"/>
-              <a:t>51</a:t>
+              <a:t>53</a:t>
             </a:fld>
             <a:endParaRPr lang="en-US"/>
           </a:p>
@@ -20160,9 +21097,9 @@
 </p:sld>
 </file>
 
-<file path=ppt/slides/slide52.xml><?xml version="1.0" encoding="utf-8"?>
+<file path=ppt/slides/slide54.xml><?xml version="1.0" encoding="utf-8"?>
 <p:sld xmlns:a="http://schemas.openxmlformats.org/drawingml/2006/main" xmlns:r="http://schemas.openxmlformats.org/officeDocument/2006/relationships" xmlns:p="http://schemas.openxmlformats.org/presentationml/2006/main">
-  <p:cSld name="Slide 52">
+  <p:cSld name="Slide 54">
     <p:spTree>
       <p:nvGrpSpPr>
         <p:cNvPr id="1" name=""/>
@@ -20450,7 +21387,7 @@
             <a:pPr algn="ctr"/>
             <a:fld id="{F7021451-1387-4CA6-816F-3879F97B5CBC}" type="slidenum">
               <a:rPr b="1" lang="en-US"/>
-              <a:t>52</a:t>
+              <a:t>54</a:t>
             </a:fld>
             <a:endParaRPr lang="en-US"/>
           </a:p>
